--- a/curriculum/M01/W06/L01/slides.pptx
+++ b/curriculum/M01/W06/L01/slides.pptx
@@ -6824,11 +6824,40 @@
                 <a:ea typeface="Malgun Gothic"/>
                 <a:cs typeface="Malgun Gothic"/>
               </a:rPr>
-              <a:t>: 벡터와 삽입할 DNA를 같은 제한효소로 자른다. 2. </a:t>
-            </a:r>
+              <a:t>: 벡터와 삽입할 DNA를 같은 제한효소로 자른다.</a:t>
+            </a:r>
+          </a:p>
+          <a:p>
+            <a:pPr>
+              <a:spcAft>
+                <a:spcPts val="900"/>
+              </a:spcAft>
+            </a:pPr>
             <a:r>
               <a:rPr sz="1400" b="1" i="0">
                 <a:solidFill>
+                  <a:srgbClr val="F2B705"/>
+                </a:solidFill>
+                <a:latin typeface="Malgun Gothic"/>
+                <a:ea typeface="Malgun Gothic"/>
+                <a:cs typeface="Malgun Gothic"/>
+              </a:rPr>
+              <a:t>•  </a:t>
+            </a:r>
+            <a:r>
+              <a:rPr sz="1400" b="0" i="0">
+                <a:solidFill>
+                  <a:srgbClr val="11202B"/>
+                </a:solidFill>
+                <a:latin typeface="Malgun Gothic"/>
+                <a:ea typeface="Malgun Gothic"/>
+                <a:cs typeface="Malgun Gothic"/>
+              </a:rPr>
+              <a:t>2. </a:t>
+            </a:r>
+            <a:r>
+              <a:rPr sz="1400" b="1" i="0">
+                <a:solidFill>
                   <a:srgbClr val="11202B"/>
                 </a:solidFill>
                 <a:latin typeface="Malgun Gothic"/>
@@ -6846,11 +6875,40 @@
                 <a:ea typeface="Malgun Gothic"/>
                 <a:cs typeface="Malgun Gothic"/>
               </a:rPr>
-              <a:t>: 두 조각을 섞고 DNA ligase를 넣어 봉합한다. 벡터가 자기끼리 다시 붙는 경우가 많아 효율은 낮다. 3. </a:t>
-            </a:r>
+              <a:t>: 두 조각을 섞고 DNA ligase를 넣어 봉합한다. 벡터가 자기끼리 다시 붙는 경우가 많아 효율은 낮다.</a:t>
+            </a:r>
+          </a:p>
+          <a:p>
+            <a:pPr>
+              <a:spcAft>
+                <a:spcPts val="900"/>
+              </a:spcAft>
+            </a:pPr>
             <a:r>
               <a:rPr sz="1400" b="1" i="0">
                 <a:solidFill>
+                  <a:srgbClr val="F2B705"/>
+                </a:solidFill>
+                <a:latin typeface="Malgun Gothic"/>
+                <a:ea typeface="Malgun Gothic"/>
+                <a:cs typeface="Malgun Gothic"/>
+              </a:rPr>
+              <a:t>•  </a:t>
+            </a:r>
+            <a:r>
+              <a:rPr sz="1400" b="0" i="0">
+                <a:solidFill>
+                  <a:srgbClr val="11202B"/>
+                </a:solidFill>
+                <a:latin typeface="Malgun Gothic"/>
+                <a:ea typeface="Malgun Gothic"/>
+                <a:cs typeface="Malgun Gothic"/>
+              </a:rPr>
+              <a:t>3. </a:t>
+            </a:r>
+            <a:r>
+              <a:rPr sz="1400" b="1" i="0">
+                <a:solidFill>
                   <a:srgbClr val="11202B"/>
                 </a:solidFill>
                 <a:latin typeface="Malgun Gothic"/>
@@ -6868,11 +6926,40 @@
                 <a:ea typeface="Malgun Gothic"/>
                 <a:cs typeface="Malgun Gothic"/>
               </a:rPr>
-              <a:t>: 연결 산물을 *E. coli*에 넣는다. CaCl₂ 처리와 열충격, 또는 전기천공(electroporation)을 쓴다. 4. </a:t>
-            </a:r>
+              <a:t>: 연결 산물을 *E. coli*에 넣는다. CaCl₂ 처리와 열충격, 또는 전기천공(electroporation)을 쓴다.</a:t>
+            </a:r>
+          </a:p>
+          <a:p>
+            <a:pPr>
+              <a:spcAft>
+                <a:spcPts val="900"/>
+              </a:spcAft>
+            </a:pPr>
             <a:r>
               <a:rPr sz="1400" b="1" i="0">
                 <a:solidFill>
+                  <a:srgbClr val="F2B705"/>
+                </a:solidFill>
+                <a:latin typeface="Malgun Gothic"/>
+                <a:ea typeface="Malgun Gothic"/>
+                <a:cs typeface="Malgun Gothic"/>
+              </a:rPr>
+              <a:t>•  </a:t>
+            </a:r>
+            <a:r>
+              <a:rPr sz="1400" b="0" i="0">
+                <a:solidFill>
+                  <a:srgbClr val="11202B"/>
+                </a:solidFill>
+                <a:latin typeface="Malgun Gothic"/>
+                <a:ea typeface="Malgun Gothic"/>
+                <a:cs typeface="Malgun Gothic"/>
+              </a:rPr>
+              <a:t>4. </a:t>
+            </a:r>
+            <a:r>
+              <a:rPr sz="1400" b="1" i="0">
+                <a:solidFill>
                   <a:srgbClr val="11202B"/>
                 </a:solidFill>
                 <a:latin typeface="Malgun Gothic"/>
@@ -6890,7 +6977,36 @@
                 <a:ea typeface="Malgun Gothic"/>
                 <a:cs typeface="Malgun Gothic"/>
               </a:rPr>
-              <a:t>: 항생제가 든 배지에 깔아 벡터가 들어간 세포만 자라게 한다. 5. </a:t>
+              <a:t>: 항생제가 든 배지에 깔아 벡터가 들어간 세포만 자라게 한다.</a:t>
+            </a:r>
+          </a:p>
+          <a:p>
+            <a:pPr>
+              <a:spcAft>
+                <a:spcPts val="900"/>
+              </a:spcAft>
+            </a:pPr>
+            <a:r>
+              <a:rPr sz="1400" b="1" i="0">
+                <a:solidFill>
+                  <a:srgbClr val="F2B705"/>
+                </a:solidFill>
+                <a:latin typeface="Malgun Gothic"/>
+                <a:ea typeface="Malgun Gothic"/>
+                <a:cs typeface="Malgun Gothic"/>
+              </a:rPr>
+              <a:t>•  </a:t>
+            </a:r>
+            <a:r>
+              <a:rPr sz="1400" b="0" i="0">
+                <a:solidFill>
+                  <a:srgbClr val="11202B"/>
+                </a:solidFill>
+                <a:latin typeface="Malgun Gothic"/>
+                <a:ea typeface="Malgun Gothic"/>
+                <a:cs typeface="Malgun Gothic"/>
+              </a:rPr>
+              <a:t>5. </a:t>
             </a:r>
             <a:r>
               <a:rPr sz="1400" b="1" i="0">
@@ -9262,11 +9378,40 @@
                 <a:ea typeface="Malgun Gothic"/>
                 <a:cs typeface="Malgun Gothic"/>
               </a:rPr>
-              <a:t>, 94~96°C, 15~30초. 두 사슬이 분리된다. 2. </a:t>
-            </a:r>
+              <a:t>, 94~96°C, 15~30초. 두 사슬이 분리된다.</a:t>
+            </a:r>
+          </a:p>
+          <a:p>
+            <a:pPr>
+              <a:spcAft>
+                <a:spcPts val="900"/>
+              </a:spcAft>
+            </a:pPr>
             <a:r>
               <a:rPr sz="1400" b="1" i="0">
                 <a:solidFill>
+                  <a:srgbClr val="F2B705"/>
+                </a:solidFill>
+                <a:latin typeface="Malgun Gothic"/>
+                <a:ea typeface="Malgun Gothic"/>
+                <a:cs typeface="Malgun Gothic"/>
+              </a:rPr>
+              <a:t>•  </a:t>
+            </a:r>
+            <a:r>
+              <a:rPr sz="1400" b="0" i="0">
+                <a:solidFill>
+                  <a:srgbClr val="11202B"/>
+                </a:solidFill>
+                <a:latin typeface="Malgun Gothic"/>
+                <a:ea typeface="Malgun Gothic"/>
+                <a:cs typeface="Malgun Gothic"/>
+              </a:rPr>
+              <a:t>2. </a:t>
+            </a:r>
+            <a:r>
+              <a:rPr sz="1400" b="1" i="0">
+                <a:solidFill>
                   <a:srgbClr val="11202B"/>
                 </a:solidFill>
                 <a:latin typeface="Malgun Gothic"/>
@@ -9284,7 +9429,36 @@
                 <a:ea typeface="Malgun Gothic"/>
                 <a:cs typeface="Malgun Gothic"/>
               </a:rPr>
-              <a:t>, 50~65°C, 15~60초. primer가 주형의 상보적 부위에 결합한다. 온도는 primer의 melting temperature에서 약 5°C 낮게 잡는다. 3. </a:t>
+              <a:t>, 50~65°C, 15~60초. primer가 주형의 상보적 부위에 결합한다. 온도는 primer의 melting temperature에서 약 5°C 낮게 잡는다.</a:t>
+            </a:r>
+          </a:p>
+          <a:p>
+            <a:pPr>
+              <a:spcAft>
+                <a:spcPts val="900"/>
+              </a:spcAft>
+            </a:pPr>
+            <a:r>
+              <a:rPr sz="1400" b="1" i="0">
+                <a:solidFill>
+                  <a:srgbClr val="F2B705"/>
+                </a:solidFill>
+                <a:latin typeface="Malgun Gothic"/>
+                <a:ea typeface="Malgun Gothic"/>
+                <a:cs typeface="Malgun Gothic"/>
+              </a:rPr>
+              <a:t>•  </a:t>
+            </a:r>
+            <a:r>
+              <a:rPr sz="1400" b="0" i="0">
+                <a:solidFill>
+                  <a:srgbClr val="11202B"/>
+                </a:solidFill>
+                <a:latin typeface="Malgun Gothic"/>
+                <a:ea typeface="Malgun Gothic"/>
+                <a:cs typeface="Malgun Gothic"/>
+              </a:rPr>
+              <a:t>3. </a:t>
             </a:r>
             <a:r>
               <a:rPr sz="1400" b="1" i="0">
@@ -11835,11 +12009,40 @@
                 <a:ea typeface="Malgun Gothic"/>
                 <a:cs typeface="Malgun Gothic"/>
               </a:rPr>
-              <a:t>: DNA를 수백 염기쌍으로 조각내고 양쪽에 adapter를 붙인다. 2. </a:t>
-            </a:r>
+              <a:t>: DNA를 수백 염기쌍으로 조각내고 양쪽에 adapter를 붙인다.</a:t>
+            </a:r>
+          </a:p>
+          <a:p>
+            <a:pPr>
+              <a:spcAft>
+                <a:spcPts val="900"/>
+              </a:spcAft>
+            </a:pPr>
             <a:r>
               <a:rPr sz="1400" b="1" i="0">
                 <a:solidFill>
+                  <a:srgbClr val="F2B705"/>
+                </a:solidFill>
+                <a:latin typeface="Malgun Gothic"/>
+                <a:ea typeface="Malgun Gothic"/>
+                <a:cs typeface="Malgun Gothic"/>
+              </a:rPr>
+              <a:t>•  </a:t>
+            </a:r>
+            <a:r>
+              <a:rPr sz="1400" b="0" i="0">
+                <a:solidFill>
+                  <a:srgbClr val="11202B"/>
+                </a:solidFill>
+                <a:latin typeface="Malgun Gothic"/>
+                <a:ea typeface="Malgun Gothic"/>
+                <a:cs typeface="Malgun Gothic"/>
+              </a:rPr>
+              <a:t>2. </a:t>
+            </a:r>
+            <a:r>
+              <a:rPr sz="1400" b="1" i="0">
+                <a:solidFill>
                   <a:srgbClr val="11202B"/>
                 </a:solidFill>
                 <a:latin typeface="Malgun Gothic"/>
@@ -11857,11 +12060,40 @@
                 <a:ea typeface="Malgun Gothic"/>
                 <a:cs typeface="Malgun Gothic"/>
               </a:rPr>
-              <a:t>: 각 조각을 고체 표면의 한 지점에 고정하고 그 자리에서 PCR로 증폭해 같은 서열의 집락을 만든다. 3. </a:t>
-            </a:r>
+              <a:t>: 각 조각을 고체 표면의 한 지점에 고정하고 그 자리에서 PCR로 증폭해 같은 서열의 집락을 만든다.</a:t>
+            </a:r>
+          </a:p>
+          <a:p>
+            <a:pPr>
+              <a:spcAft>
+                <a:spcPts val="900"/>
+              </a:spcAft>
+            </a:pPr>
             <a:r>
               <a:rPr sz="1400" b="1" i="0">
                 <a:solidFill>
+                  <a:srgbClr val="F2B705"/>
+                </a:solidFill>
+                <a:latin typeface="Malgun Gothic"/>
+                <a:ea typeface="Malgun Gothic"/>
+                <a:cs typeface="Malgun Gothic"/>
+              </a:rPr>
+              <a:t>•  </a:t>
+            </a:r>
+            <a:r>
+              <a:rPr sz="1400" b="0" i="0">
+                <a:solidFill>
+                  <a:srgbClr val="11202B"/>
+                </a:solidFill>
+                <a:latin typeface="Malgun Gothic"/>
+                <a:ea typeface="Malgun Gothic"/>
+                <a:cs typeface="Malgun Gothic"/>
+              </a:rPr>
+              <a:t>3. </a:t>
+            </a:r>
+            <a:r>
+              <a:rPr sz="1400" b="1" i="0">
+                <a:solidFill>
                   <a:srgbClr val="11202B"/>
                 </a:solidFill>
                 <a:latin typeface="Malgun Gothic"/>
@@ -11879,7 +12111,36 @@
                 <a:ea typeface="Malgun Gothic"/>
                 <a:cs typeface="Malgun Gothic"/>
               </a:rPr>
-              <a:t>: 형광을 붙인 nucleotide를 한 번에 한 개씩 붙이고 영상을 찍어 어느 염기가 들어갔는지 읽는다. 수억 개 지점을 한 장의 영상으로 동시에 읽는다. 4. </a:t>
+              <a:t>: 형광을 붙인 nucleotide를 한 번에 한 개씩 붙이고 영상을 찍어 어느 염기가 들어갔는지 읽는다. 수억 개 지점을 한 장의 영상으로 동시에 읽는다.</a:t>
+            </a:r>
+          </a:p>
+          <a:p>
+            <a:pPr>
+              <a:spcAft>
+                <a:spcPts val="900"/>
+              </a:spcAft>
+            </a:pPr>
+            <a:r>
+              <a:rPr sz="1400" b="1" i="0">
+                <a:solidFill>
+                  <a:srgbClr val="F2B705"/>
+                </a:solidFill>
+                <a:latin typeface="Malgun Gothic"/>
+                <a:ea typeface="Malgun Gothic"/>
+                <a:cs typeface="Malgun Gothic"/>
+              </a:rPr>
+              <a:t>•  </a:t>
+            </a:r>
+            <a:r>
+              <a:rPr sz="1400" b="0" i="0">
+                <a:solidFill>
+                  <a:srgbClr val="11202B"/>
+                </a:solidFill>
+                <a:latin typeface="Malgun Gothic"/>
+                <a:ea typeface="Malgun Gothic"/>
+                <a:cs typeface="Malgun Gothic"/>
+              </a:rPr>
+              <a:t>4. </a:t>
             </a:r>
             <a:r>
               <a:rPr sz="1400" b="1" i="0">

--- a/curriculum/M01/W06/L01/slides.pptx
+++ b/curriculum/M01/W06/L01/slides.pptx
@@ -16145,7 +16145,7 @@
                 <a:ea typeface="Malgun Gothic"/>
                 <a:cs typeface="Malgun Gothic"/>
               </a:rPr>
-              <a:t>M01-W05-L03 유전정보의 흐름 — DNA 복제, 전사, 번역, 염기쌍 상보성, reverse transcriptase</a:t>
+              <a:t>M01-W05-L03 유전정보의 흐름: 복제·전사·번역 — DNA 복제, 전사, 번역, 염기쌍 상보성, reverse transcriptase</a:t>
             </a:r>
           </a:p>
           <a:p>
